--- a/decks/combined-waves/combined-waves_ch4_reflection-refraction.pptx
+++ b/decks/combined-waves/combined-waves_ch4_reflection-refraction.pptx
@@ -127,29 +127,29 @@
   <p:extLst>
     <p:ext uri="{521415D9-36F7-43E2-AB2F-B90AF26B5E84}">
       <p14:sectionLst xmlns:p14="http://schemas.microsoft.com/office/powerpoint/2010/main">
-        <p14:section name="Opening" id="{769c59bb-5cd4-5642-416a-f03a6cd318f8}">
+        <p14:section name="Opening" id="{50b6ca81-6324-9df9-9c96-fa337e8eac51}">
           <p14:sldIdLst>
             <p14:sldId id="256"/>
           </p14:sldIdLst>
         </p14:section>
-        <p14:section name="Gate" id="{2ed50817-ece7-4309-1ed3-657af6b43f30}">
+        <p14:section name="Gate" id="{a516449e-0d51-5733-7ba1-83b066fa6b91}">
           <p14:sldIdLst>
             <p14:sldId id="257"/>
             <p14:sldId id="258"/>
           </p14:sldIdLst>
         </p14:section>
-        <p14:section name="Pre-teach" id="{f1813daf-07b7-fa7d-1fc1-08f1e966c1fb}">
+        <p14:section name="Pre-teach" id="{47b0d525-8e9d-e394-5bdc-f9095d0e05d2}">
           <p14:sldIdLst>
             <p14:sldId id="259"/>
           </p14:sldIdLst>
         </p14:section>
-        <p14:section name="Read-along" id="{0ef83e5e-a2f1-deb5-5578-2dbeb38fc2fd}">
+        <p14:section name="Read-along" id="{c99776ba-5e2c-ae0f-8c91-dd685b2904da}">
           <p14:sldIdLst>
             <p14:sldId id="260"/>
             <p14:sldId id="261"/>
           </p14:sldIdLst>
         </p14:section>
-        <p14:section name="Teach" id="{5291bf1c-7682-cd29-eae6-e9f1f9763a05}">
+        <p14:section name="Teach" id="{80d15d9c-38c4-d46f-79fd-ec0e91853928}">
           <p14:sldIdLst>
             <p14:sldId id="262"/>
             <p14:sldId id="263"/>
@@ -159,7 +159,7 @@
             <p14:sldId id="267"/>
           </p14:sldIdLst>
         </p14:section>
-        <p14:section name="Routes" id="{7eb6e1d4-eb2c-5d36-f3ee-03deb84cfa57}">
+        <p14:section name="Routes" id="{4b8106cb-ba20-c3d1-202a-ffb11475223e}">
           <p14:sldIdLst>
             <p14:sldId id="268"/>
             <p14:sldId id="269"/>
@@ -167,12 +167,12 @@
             <p14:sldId id="271"/>
           </p14:sldIdLst>
         </p14:section>
-        <p14:section name="Close" id="{c0c4b676-4883-2cdc-6532-79b9e5f30277}">
+        <p14:section name="Close" id="{3f88872e-86b5-cf4f-6e10-e4140896fac4}">
           <p14:sldIdLst>
             <p14:sldId id="272"/>
           </p14:sldIdLst>
         </p14:section>
-        <p14:section name="Answers" id="{507f9998-1634-4a0a-7e93-13367b7e5e42}">
+        <p14:section name="Answers" id="{16453884-928a-61f0-526d-64a3c91936c8}">
           <p14:sldIdLst>
             <p14:sldId id="273"/>
             <p14:sldId id="274"/>
@@ -1606,9 +1606,9 @@
             <a:r>
               <a:rPr lang="en-US" dirty="0"/>
               <a:t>Do now — retrieval. Silent, no notes, no help: recall comes before any support. Give about four minutes.
-1. When a wave is reflected from a barrier, which one of these changes?  →  A   its direction
+1. When a wave is reflected from a barrier, which one of these changes?  →  D   its direction
 2. The angle of incidence is ___ the angle of reflection.  →  equal to
-3. Water waves slow down as they pass from deep water into shallow water. What happens to their wavelength and frequency?  →  A   wavelength decreases; frequency stays the same
+3. Water waves slow down as they pass from deep water into shallow water. What happens to their wavelength and frequency?  →  B   wavelength decreases; frequency stays the same
 Circulate: who gets 3/3 (Stretch route), 2/3 (Core), 0–1 (Support)? Use this to route pupils later in the lesson.</a:t>
             </a:r>
             <a:endParaRPr lang="en-US" dirty="0"/>
@@ -1882,9 +1882,9 @@
             <a:r>
               <a:rPr lang="en-US" dirty="0"/>
               <a:t>Answers — pupils mark their own in a different colour, then hands up for 3/3, 2/3, 1/3.
-1. A   its direction. Reflection changes only the direction of travel. The wave stays in the same material, so its speed, wavelength and frequency are unchanged.
+1. D   its direction. Reflection changes only the direction of travel. The wave stays in the same material, so its speed, wavelength and frequency are unchanged.
 2. equal to. The law of reflection: angle of incidence = angle of reflection, both measured from the normal.
-3. A   wavelength decreases; frequency stays the same. Frequency is fixed by the source. With v = f λ and a smaller v, λ must be smaller: the wavefronts bunch up.
+3. B   wavelength decreases; frequency stays the same. Frequency is fixed by the source. With v = f λ and a smaller v, λ must be smaller: the wavefronts bunch up.
 Say the route each score points to: 3/3 Stretch, 2/3 Core, 0–1 Support. Pupils may choose to move up.</a:t>
             </a:r>
             <a:endParaRPr lang="en-US" dirty="0"/>
@@ -6649,7 +6649,7 @@
                 <a:ea typeface="Calibri" pitchFamily="34" charset="-122"/>
                 <a:cs typeface="Calibri" pitchFamily="34" charset="-120"/>
               </a:rPr>
-              <a:t>It speeds up and bends away from the normal.</a:t>
+              <a:t>It speeds up and bends towards the normal.</a:t>
             </a:r>
             <a:endParaRPr lang="en-US" sz="2600" dirty="0"/>
           </a:p>
@@ -6686,7 +6686,7 @@
                 <a:ea typeface="Calibri" pitchFamily="34" charset="-122"/>
                 <a:cs typeface="Calibri" pitchFamily="34" charset="-120"/>
               </a:rPr>
-              <a:t>It slows down but does not change direction.</a:t>
+              <a:t>It speeds up and bends away from the normal.</a:t>
             </a:r>
             <a:endParaRPr lang="en-US" sz="2600" dirty="0"/>
           </a:p>
@@ -6723,7 +6723,7 @@
                 <a:ea typeface="Calibri" pitchFamily="34" charset="-122"/>
                 <a:cs typeface="Calibri" pitchFamily="34" charset="-120"/>
               </a:rPr>
-              <a:t>It speeds up and bends towards the normal.</a:t>
+              <a:t>It slows down but does not change direction.</a:t>
             </a:r>
             <a:endParaRPr lang="en-US" sz="2600" dirty="0"/>
           </a:p>
@@ -10931,7 +10931,7 @@
                 <a:ea typeface="Calibri" pitchFamily="34" charset="-122"/>
                 <a:cs typeface="Calibri" pitchFamily="34" charset="-120"/>
               </a:rPr>
-              <a:t>its direction</a:t>
+              <a:t>its frequency</a:t>
             </a:r>
             <a:endParaRPr lang="en-US" sz="2200" dirty="0"/>
           </a:p>
@@ -11042,7 +11042,7 @@
                 <a:ea typeface="Calibri" pitchFamily="34" charset="-122"/>
                 <a:cs typeface="Calibri" pitchFamily="34" charset="-120"/>
               </a:rPr>
-              <a:t>its frequency</a:t>
+              <a:t>its direction</a:t>
             </a:r>
             <a:endParaRPr lang="en-US" sz="2200" dirty="0"/>
           </a:p>
@@ -11444,7 +11444,7 @@
                 <a:ea typeface="Calibri" pitchFamily="34" charset="-122"/>
                 <a:cs typeface="Calibri" pitchFamily="34" charset="-120"/>
               </a:rPr>
-              <a:t>wavelength decreases; frequency stays the same</a:t>
+              <a:t>wavelength stays the same; frequency decreases</a:t>
             </a:r>
             <a:endParaRPr lang="en-US" sz="1800" dirty="0"/>
           </a:p>
@@ -11481,7 +11481,7 @@
                 <a:ea typeface="Calibri" pitchFamily="34" charset="-122"/>
                 <a:cs typeface="Calibri" pitchFamily="34" charset="-120"/>
               </a:rPr>
-              <a:t>wavelength increases; frequency stays the same</a:t>
+              <a:t>wavelength decreases; frequency stays the same</a:t>
             </a:r>
             <a:endParaRPr lang="en-US" sz="1800" dirty="0"/>
           </a:p>
@@ -11518,7 +11518,7 @@
                 <a:ea typeface="Calibri" pitchFamily="34" charset="-122"/>
                 <a:cs typeface="Calibri" pitchFamily="34" charset="-120"/>
               </a:rPr>
-              <a:t>wavelength stays the same; frequency decreases</a:t>
+              <a:t>both wavelength and frequency decrease</a:t>
             </a:r>
             <a:endParaRPr lang="en-US" sz="1800" dirty="0"/>
           </a:p>
@@ -11555,7 +11555,7 @@
                 <a:ea typeface="Calibri" pitchFamily="34" charset="-122"/>
                 <a:cs typeface="Calibri" pitchFamily="34" charset="-120"/>
               </a:rPr>
-              <a:t>both wavelength and frequency decrease</a:t>
+              <a:t>wavelength increases; frequency stays the same</a:t>
             </a:r>
             <a:endParaRPr lang="en-US" sz="1800" dirty="0"/>
           </a:p>
@@ -12734,7 +12734,7 @@
                 <a:ea typeface="Calibri" pitchFamily="34" charset="-122"/>
                 <a:cs typeface="Calibri" pitchFamily="34" charset="-120"/>
               </a:rPr>
-              <a:t>A   its direction</a:t>
+              <a:t>D   its direction</a:t>
             </a:r>
             <a:endParaRPr lang="en-US" sz="2200" dirty="0"/>
           </a:p>
@@ -13214,7 +13214,7 @@
                 <a:ea typeface="Calibri" pitchFamily="34" charset="-122"/>
                 <a:cs typeface="Calibri" pitchFamily="34" charset="-120"/>
               </a:rPr>
-              <a:t>A   wavelength decreases; frequency stays the same</a:t>
+              <a:t>B   wavelength decreases; frequency stays the same</a:t>
             </a:r>
             <a:endParaRPr lang="en-US" sz="2200" dirty="0"/>
           </a:p>

--- a/decks/combined-waves/combined-waves_ch4_reflection-refraction.pptx
+++ b/decks/combined-waves/combined-waves_ch4_reflection-refraction.pptx
@@ -127,29 +127,29 @@
   <p:extLst>
     <p:ext uri="{521415D9-36F7-43E2-AB2F-B90AF26B5E84}">
       <p14:sectionLst xmlns:p14="http://schemas.microsoft.com/office/powerpoint/2010/main">
-        <p14:section name="Opening" id="{50b6ca81-6324-9df9-9c96-fa337e8eac51}">
+        <p14:section name="Opening" id="{55e1a18c-1402-a5c7-419c-a96954310833}">
           <p14:sldIdLst>
             <p14:sldId id="256"/>
           </p14:sldIdLst>
         </p14:section>
-        <p14:section name="Gate" id="{a516449e-0d51-5733-7ba1-83b066fa6b91}">
+        <p14:section name="Gate" id="{e75e7ce9-5477-8363-cb51-8710766d982f}">
           <p14:sldIdLst>
             <p14:sldId id="257"/>
             <p14:sldId id="258"/>
           </p14:sldIdLst>
         </p14:section>
-        <p14:section name="Pre-teach" id="{47b0d525-8e9d-e394-5bdc-f9095d0e05d2}">
+        <p14:section name="Pre-teach" id="{91113d75-dcd5-0db3-bb07-30b98252f346}">
           <p14:sldIdLst>
             <p14:sldId id="259"/>
           </p14:sldIdLst>
         </p14:section>
-        <p14:section name="Read-along" id="{c99776ba-5e2c-ae0f-8c91-dd685b2904da}">
+        <p14:section name="Read-along" id="{b1b1e839-505a-8c4b-d70b-02a34563ec50}">
           <p14:sldIdLst>
             <p14:sldId id="260"/>
             <p14:sldId id="261"/>
           </p14:sldIdLst>
         </p14:section>
-        <p14:section name="Teach" id="{80d15d9c-38c4-d46f-79fd-ec0e91853928}">
+        <p14:section name="Teach" id="{4e6bc9f9-5790-0b83-f498-eea588b8a32e}">
           <p14:sldIdLst>
             <p14:sldId id="262"/>
             <p14:sldId id="263"/>
@@ -159,7 +159,7 @@
             <p14:sldId id="267"/>
           </p14:sldIdLst>
         </p14:section>
-        <p14:section name="Routes" id="{4b8106cb-ba20-c3d1-202a-ffb11475223e}">
+        <p14:section name="Routes" id="{f9ad17bf-143b-9fbe-0434-4930213afa11}">
           <p14:sldIdLst>
             <p14:sldId id="268"/>
             <p14:sldId id="269"/>
@@ -167,12 +167,12 @@
             <p14:sldId id="271"/>
           </p14:sldIdLst>
         </p14:section>
-        <p14:section name="Close" id="{3f88872e-86b5-cf4f-6e10-e4140896fac4}">
+        <p14:section name="Close" id="{b3b498ed-8430-8794-df65-03ae4054b00a}">
           <p14:sldIdLst>
             <p14:sldId id="272"/>
           </p14:sldIdLst>
         </p14:section>
-        <p14:section name="Answers" id="{16453884-928a-61f0-526d-64a3c91936c8}">
+        <p14:section name="Answers" id="{addbc787-3448-ce15-5569-084cbbd14e76}">
           <p14:sldIdLst>
             <p14:sldId id="273"/>
             <p14:sldId id="274"/>
